--- a/11_Defensa/presentacion.pptx
+++ b/11_Defensa/presentacion.pptx
@@ -7015,7 +7015,7 @@
                 <a:ea typeface="Calibri" pitchFamily="34" charset="-122"/>
                 <a:cs typeface="Calibri" pitchFamily="34" charset="-120"/>
               </a:rPr>
-              <a:t>10.5281/zenodo.22238486</a:t>
+              <a:t>10.5281/zenodo.22558095</a:t>
             </a:r>
             <a:endParaRPr lang="en-US" sz="1400" dirty="0"/>
           </a:p>
@@ -7065,7 +7065,7 @@
                 <a:ea typeface="Calibri" pitchFamily="34" charset="-122"/>
                 <a:cs typeface="Calibri" pitchFamily="34" charset="-120"/>
               </a:rPr>
-              <a:t>osf.io/wkg32</a:t>
+              <a:t>osf.io/r5p8d</a:t>
             </a:r>
             <a:endParaRPr lang="en-US" sz="1400" dirty="0"/>
           </a:p>
@@ -9657,7 +9657,7 @@
                 <a:ea typeface="Calibri" pitchFamily="34" charset="-122"/>
                 <a:cs typeface="Calibri" pitchFamily="34" charset="-120"/>
               </a:rPr>
-              <a:t>Protocolo registrado en el Open Science Framework antes de iniciar la recolección (osf.io/wkg32), como salvaguarda contra HARKing y p-hacking.</a:t>
+              <a:t>Protocolo registrado en el Open Science Framework antes de iniciar la recolección (osf.io/r5p8d), como salvaguarda contra HARKing y p-hacking.</a:t>
             </a:r>
             <a:endParaRPr lang="en-US" sz="1300" dirty="0"/>
           </a:p>
